--- a/frameworks/product-engineering-template/Framework_Introduction.pptx
+++ b/frameworks/product-engineering-template/Framework_Introduction.pptx
@@ -42364,7 +42364,7 @@
               <a:buNone/>
             </a:pPr>
             <a:r>
-              <a:rPr lang="en-US" sz="1100" b="1">
+              <a:rPr lang="en-US" sz="1100" b="1" dirty="0">
                 <a:solidFill>
                   <a:srgbClr val="0D1117"/>
                 </a:solidFill>
